--- a/Document/노트.pptx
+++ b/Document/노트.pptx
@@ -264,7 +264,7 @@
           <a:p>
             <a:fld id="{648F4243-01F6-402A-BD5A-4BF3AAF5FC46}" type="datetimeFigureOut">
               <a:rPr lang="ko-KR" altLang="en-US" smtClean="0"/>
-              <a:t>2025-08-24</a:t>
+              <a:t>2026-05-03</a:t>
             </a:fld>
             <a:endParaRPr lang="ko-KR" altLang="en-US"/>
           </a:p>
@@ -462,7 +462,7 @@
           <a:p>
             <a:fld id="{648F4243-01F6-402A-BD5A-4BF3AAF5FC46}" type="datetimeFigureOut">
               <a:rPr lang="ko-KR" altLang="en-US" smtClean="0"/>
-              <a:t>2025-08-24</a:t>
+              <a:t>2026-05-03</a:t>
             </a:fld>
             <a:endParaRPr lang="ko-KR" altLang="en-US"/>
           </a:p>
@@ -670,7 +670,7 @@
           <a:p>
             <a:fld id="{648F4243-01F6-402A-BD5A-4BF3AAF5FC46}" type="datetimeFigureOut">
               <a:rPr lang="ko-KR" altLang="en-US" smtClean="0"/>
-              <a:t>2025-08-24</a:t>
+              <a:t>2026-05-03</a:t>
             </a:fld>
             <a:endParaRPr lang="ko-KR" altLang="en-US"/>
           </a:p>
@@ -868,7 +868,7 @@
           <a:p>
             <a:fld id="{648F4243-01F6-402A-BD5A-4BF3AAF5FC46}" type="datetimeFigureOut">
               <a:rPr lang="ko-KR" altLang="en-US" smtClean="0"/>
-              <a:t>2025-08-24</a:t>
+              <a:t>2026-05-03</a:t>
             </a:fld>
             <a:endParaRPr lang="ko-KR" altLang="en-US"/>
           </a:p>
@@ -1143,7 +1143,7 @@
           <a:p>
             <a:fld id="{648F4243-01F6-402A-BD5A-4BF3AAF5FC46}" type="datetimeFigureOut">
               <a:rPr lang="ko-KR" altLang="en-US" smtClean="0"/>
-              <a:t>2025-08-24</a:t>
+              <a:t>2026-05-03</a:t>
             </a:fld>
             <a:endParaRPr lang="ko-KR" altLang="en-US"/>
           </a:p>
@@ -1408,7 +1408,7 @@
           <a:p>
             <a:fld id="{648F4243-01F6-402A-BD5A-4BF3AAF5FC46}" type="datetimeFigureOut">
               <a:rPr lang="ko-KR" altLang="en-US" smtClean="0"/>
-              <a:t>2025-08-24</a:t>
+              <a:t>2026-05-03</a:t>
             </a:fld>
             <a:endParaRPr lang="ko-KR" altLang="en-US"/>
           </a:p>
@@ -1820,7 +1820,7 @@
           <a:p>
             <a:fld id="{648F4243-01F6-402A-BD5A-4BF3AAF5FC46}" type="datetimeFigureOut">
               <a:rPr lang="ko-KR" altLang="en-US" smtClean="0"/>
-              <a:t>2025-08-24</a:t>
+              <a:t>2026-05-03</a:t>
             </a:fld>
             <a:endParaRPr lang="ko-KR" altLang="en-US"/>
           </a:p>
@@ -1961,7 +1961,7 @@
           <a:p>
             <a:fld id="{648F4243-01F6-402A-BD5A-4BF3AAF5FC46}" type="datetimeFigureOut">
               <a:rPr lang="ko-KR" altLang="en-US" smtClean="0"/>
-              <a:t>2025-08-24</a:t>
+              <a:t>2026-05-03</a:t>
             </a:fld>
             <a:endParaRPr lang="ko-KR" altLang="en-US"/>
           </a:p>
@@ -2074,7 +2074,7 @@
           <a:p>
             <a:fld id="{648F4243-01F6-402A-BD5A-4BF3AAF5FC46}" type="datetimeFigureOut">
               <a:rPr lang="ko-KR" altLang="en-US" smtClean="0"/>
-              <a:t>2025-08-24</a:t>
+              <a:t>2026-05-03</a:t>
             </a:fld>
             <a:endParaRPr lang="ko-KR" altLang="en-US"/>
           </a:p>
@@ -2385,7 +2385,7 @@
           <a:p>
             <a:fld id="{648F4243-01F6-402A-BD5A-4BF3AAF5FC46}" type="datetimeFigureOut">
               <a:rPr lang="ko-KR" altLang="en-US" smtClean="0"/>
-              <a:t>2025-08-24</a:t>
+              <a:t>2026-05-03</a:t>
             </a:fld>
             <a:endParaRPr lang="ko-KR" altLang="en-US"/>
           </a:p>
@@ -2673,7 +2673,7 @@
           <a:p>
             <a:fld id="{648F4243-01F6-402A-BD5A-4BF3AAF5FC46}" type="datetimeFigureOut">
               <a:rPr lang="ko-KR" altLang="en-US" smtClean="0"/>
-              <a:t>2025-08-24</a:t>
+              <a:t>2026-05-03</a:t>
             </a:fld>
             <a:endParaRPr lang="ko-KR" altLang="en-US"/>
           </a:p>
@@ -2914,7 +2914,7 @@
           <a:p>
             <a:fld id="{648F4243-01F6-402A-BD5A-4BF3AAF5FC46}" type="datetimeFigureOut">
               <a:rPr lang="ko-KR" altLang="en-US" smtClean="0"/>
-              <a:t>2025-08-24</a:t>
+              <a:t>2026-05-03</a:t>
             </a:fld>
             <a:endParaRPr lang="ko-KR" altLang="en-US"/>
           </a:p>
@@ -5947,7 +5947,7 @@
         <p:spPr>
           <a:xfrm>
             <a:off x="551088" y="842530"/>
-            <a:ext cx="11221811" cy="3901774"/>
+            <a:ext cx="11221811" cy="4763548"/>
           </a:xfrm>
           <a:prstGeom prst="rect">
             <a:avLst/>
@@ -5984,6 +5984,42 @@
             <a:r>
               <a:rPr lang="ko-KR" altLang="en-US" sz="1400" dirty="0"/>
               <a:t> 검사</a:t>
+            </a:r>
+            <a:endParaRPr lang="en-US" altLang="ko-KR" sz="1400" dirty="0"/>
+          </a:p>
+          <a:p>
+            <a:pPr>
+              <a:lnSpc>
+                <a:spcPct val="200000"/>
+              </a:lnSpc>
+            </a:pPr>
+            <a:r>
+              <a:rPr lang="ko-KR" altLang="en-US" sz="1400" dirty="0"/>
+              <a:t>방어 스택 </a:t>
+            </a:r>
+            <a:r>
+              <a:rPr lang="ko-KR" altLang="en-US" sz="1400" dirty="0" err="1"/>
+              <a:t>성기사</a:t>
+            </a:r>
+            <a:endParaRPr lang="en-US" altLang="ko-KR" sz="1400" dirty="0"/>
+          </a:p>
+          <a:p>
+            <a:pPr>
+              <a:lnSpc>
+                <a:spcPct val="200000"/>
+              </a:lnSpc>
+            </a:pPr>
+            <a:r>
+              <a:rPr lang="ko-KR" altLang="en-US" sz="1400" dirty="0"/>
+              <a:t>공격 스택</a:t>
+            </a:r>
+            <a:r>
+              <a:rPr lang="en-US" altLang="ko-KR" sz="1400" dirty="0"/>
+              <a:t>, </a:t>
+            </a:r>
+            <a:r>
+              <a:rPr lang="ko-KR" altLang="en-US" sz="1400"/>
+              <a:t>방어 페널티 흑기사</a:t>
             </a:r>
             <a:endParaRPr lang="en-US" altLang="ko-KR" sz="1400" dirty="0"/>
           </a:p>
